--- a/答辩材料/答辩PPT.pptx
+++ b/答辩材料/答辩PPT.pptx
@@ -16540,6 +16540,10 @@
           </a:solidFill>
           <a:ln/>
         </p:spPr>
+        <p:txBody>
+          <a:bodyPr/>
+          <a:p/>
+        </p:txBody>
       </p:sp>
       <p:sp>
         <p:nvSpPr>
@@ -16560,6 +16564,10 @@
           </a:solidFill>
           <a:ln/>
         </p:spPr>
+        <p:txBody>
+          <a:bodyPr/>
+          <a:p/>
+        </p:txBody>
       </p:sp>
       <p:sp>
         <p:nvSpPr>
@@ -16832,7 +16840,7 @@
                 <a:ea typeface="Microsoft YaHei" pitchFamily="34" charset="-122"/>
                 <a:cs typeface="Microsoft YaHei" pitchFamily="34" charset="-120"/>
               </a:rPr>
-              <a:t>同簇相似度 86.9%~94.3% 全命中；阈值 0.45 → P/R/F1 = 1.0/1.0/1.0</a:t>
+              <a:t>同簇相似度 约 99% 全命中；阈值 0.45 → P/R/F1 = 1.0/1.0/1.0</a:t>
             </a:r>
             <a:endParaRPr lang="en-US" sz="1400" dirty="0"/>
           </a:p>
